--- a/m6/diapositivos/sessao-08-m6-f08.pptx
+++ b/m6/diapositivos/sessao-08-m6-f08.pptx
@@ -2598,7 +2598,109 @@
                 <a:ea typeface="Georgia" pitchFamily="34" charset="-122"/>
                 <a:cs typeface="Georgia" pitchFamily="34" charset="-120"/>
               </a:rPr>
-              <a:t>Em grupo, criem seis fotografias, uma curta de dois a três minutos ou o formato do vosso curso (quadro «Encomenda por curso»), que acompanhem as quatro partes do poema (Ave-Marias, Noite Fechada, Ao Gás, Horas Mortas) na Lisboa de hoje, a partir do Cais do Sodré. Cada imagem ou sequência liga-se a um verso, citado com a parte. Na apresentação oral, explicam as escolhas e a relação com o poema.</a:t>
+              <a:t>Em grupo, criem </a:t>
+            </a:r>
+            <a:pPr indent="0" marL="0">
+              <a:lnSpc>
+                <a:spcPct val="120000"/>
+              </a:lnSpc>
+              <a:buNone/>
+            </a:pPr>
+            <a:r>
+              <a:rPr lang="en-US" sz="2300" b="1" dirty="0">
+                <a:solidFill>
+                  <a:srgbClr val="F2F0EA"/>
+                </a:solidFill>
+                <a:latin typeface="Georgia" pitchFamily="34" charset="0"/>
+                <a:ea typeface="Georgia" pitchFamily="34" charset="-122"/>
+                <a:cs typeface="Georgia" pitchFamily="34" charset="-120"/>
+              </a:rPr>
+              <a:t>seis fotografias</a:t>
+            </a:r>
+            <a:pPr indent="0" marL="0">
+              <a:lnSpc>
+                <a:spcPct val="120000"/>
+              </a:lnSpc>
+              <a:buNone/>
+            </a:pPr>
+            <a:r>
+              <a:rPr lang="en-US" sz="2300" dirty="0">
+                <a:solidFill>
+                  <a:srgbClr val="F2F0EA"/>
+                </a:solidFill>
+                <a:latin typeface="Georgia" pitchFamily="34" charset="0"/>
+                <a:ea typeface="Georgia" pitchFamily="34" charset="-122"/>
+                <a:cs typeface="Georgia" pitchFamily="34" charset="-120"/>
+              </a:rPr>
+              <a:t>, </a:t>
+            </a:r>
+            <a:pPr indent="0" marL="0">
+              <a:lnSpc>
+                <a:spcPct val="120000"/>
+              </a:lnSpc>
+              <a:buNone/>
+            </a:pPr>
+            <a:r>
+              <a:rPr lang="en-US" sz="2300" b="1" dirty="0">
+                <a:solidFill>
+                  <a:srgbClr val="F2F0EA"/>
+                </a:solidFill>
+                <a:latin typeface="Georgia" pitchFamily="34" charset="0"/>
+                <a:ea typeface="Georgia" pitchFamily="34" charset="-122"/>
+                <a:cs typeface="Georgia" pitchFamily="34" charset="-120"/>
+              </a:rPr>
+              <a:t>uma curta de dois a três minutos</a:t>
+            </a:r>
+            <a:pPr indent="0" marL="0">
+              <a:lnSpc>
+                <a:spcPct val="120000"/>
+              </a:lnSpc>
+              <a:buNone/>
+            </a:pPr>
+            <a:r>
+              <a:rPr lang="en-US" sz="2300" dirty="0">
+                <a:solidFill>
+                  <a:srgbClr val="F2F0EA"/>
+                </a:solidFill>
+                <a:latin typeface="Georgia" pitchFamily="34" charset="0"/>
+                <a:ea typeface="Georgia" pitchFamily="34" charset="-122"/>
+                <a:cs typeface="Georgia" pitchFamily="34" charset="-120"/>
+              </a:rPr>
+              <a:t> ou o formato do vosso curso (quadro «Encomenda por curso»), que acompanhem as quatro partes do poema («Ave-Marias», «Noite Fechada», «Ao Gás», «Horas Mortas») na Lisboa de hoje, a partir do Cais do Sodré. Cada imagem ou sequência liga-se a </a:t>
+            </a:r>
+            <a:pPr indent="0" marL="0">
+              <a:lnSpc>
+                <a:spcPct val="120000"/>
+              </a:lnSpc>
+              <a:buNone/>
+            </a:pPr>
+            <a:r>
+              <a:rPr lang="en-US" sz="2300" b="1" dirty="0">
+                <a:solidFill>
+                  <a:srgbClr val="F2F0EA"/>
+                </a:solidFill>
+                <a:latin typeface="Georgia" pitchFamily="34" charset="0"/>
+                <a:ea typeface="Georgia" pitchFamily="34" charset="-122"/>
+                <a:cs typeface="Georgia" pitchFamily="34" charset="-120"/>
+              </a:rPr>
+              <a:t>um verso</a:t>
+            </a:r>
+            <a:pPr indent="0" marL="0">
+              <a:lnSpc>
+                <a:spcPct val="120000"/>
+              </a:lnSpc>
+              <a:buNone/>
+            </a:pPr>
+            <a:r>
+              <a:rPr lang="en-US" sz="2300" dirty="0">
+                <a:solidFill>
+                  <a:srgbClr val="F2F0EA"/>
+                </a:solidFill>
+                <a:latin typeface="Georgia" pitchFamily="34" charset="0"/>
+                <a:ea typeface="Georgia" pitchFamily="34" charset="-122"/>
+                <a:cs typeface="Georgia" pitchFamily="34" charset="-120"/>
+              </a:rPr>
+              <a:t>, citado com a parte. Na apresentação oral, explicam as escolhas e a relação com o poema.</a:t>
             </a:r>
             <a:endParaRPr lang="en-US" sz="2300" dirty="0"/>
           </a:p>
@@ -3751,7 +3853,7 @@
                           <a:ea typeface="Arial" pitchFamily="34" charset="-122"/>
                           <a:cs typeface="Arial" pitchFamily="34" charset="-120"/>
                         </a:rPr>
-                        <a:t>I — Ave-Marias</a:t>
+                        <a:t>I — «Ave-Marias»</a:t>
                       </a:r>
                       <a:endParaRPr lang="en-US" sz="1800" dirty="0">
                         <a:latin typeface="Arial" charset="0"/>
@@ -3953,7 +4055,7 @@
                           <a:ea typeface="Arial" pitchFamily="34" charset="-122"/>
                           <a:cs typeface="Arial" pitchFamily="34" charset="-120"/>
                         </a:rPr>
-                        <a:t>II — Noite Fechada</a:t>
+                        <a:t>II — «Noite Fechada»</a:t>
                       </a:r>
                       <a:endParaRPr lang="en-US" sz="1800" dirty="0">
                         <a:latin typeface="Arial" charset="0"/>
@@ -4155,7 +4257,7 @@
                           <a:ea typeface="Arial" pitchFamily="34" charset="-122"/>
                           <a:cs typeface="Arial" pitchFamily="34" charset="-120"/>
                         </a:rPr>
-                        <a:t>III — Ao Gás</a:t>
+                        <a:t>III — «Ao Gás»</a:t>
                       </a:r>
                       <a:endParaRPr lang="en-US" sz="1800" dirty="0">
                         <a:latin typeface="Arial" charset="0"/>
@@ -4357,7 +4459,7 @@
                           <a:ea typeface="Arial" pitchFamily="34" charset="-122"/>
                           <a:cs typeface="Arial" pitchFamily="34" charset="-120"/>
                         </a:rPr>
-                        <a:t>IV — Horas Mortas</a:t>
+                        <a:t>IV — «Horas Mortas»</a:t>
                       </a:r>
                       <a:endParaRPr lang="en-US" sz="1800" dirty="0">
                         <a:latin typeface="Arial" charset="0"/>

--- a/m6/diapositivos/sessao-08-m6-f08.pptx
+++ b/m6/diapositivos/sessao-08-m6-f08.pptx
@@ -2615,7 +2615,7 @@
                 <a:ea typeface="Georgia" pitchFamily="34" charset="-122"/>
                 <a:cs typeface="Georgia" pitchFamily="34" charset="-120"/>
               </a:rPr>
-              <a:t>seis fotografias</a:t>
+              <a:t>quatro fotografias</a:t>
             </a:r>
             <a:pPr indent="0" marL="0">
               <a:lnSpc>
@@ -3215,7 +3215,7 @@
                 <a:ea typeface="Arial" pitchFamily="34" charset="-122"/>
                 <a:cs typeface="Arial" pitchFamily="34" charset="-120"/>
               </a:rPr>
-              <a:t>A encomenda são seis fotografias, uma curta de dois a três minutos ou o formato do teu curso, cada imagem ligada a um verso, citado com a parte do poema.</a:t>
+              <a:t>A encomenda são quatro fotografias, uma curta de dois a três minutos ou o formato do teu curso, cada imagem ligada a um verso, citado com a parte do poema.</a:t>
             </a:r>
             <a:endParaRPr lang="en-US" sz="2200" dirty="0"/>
           </a:p>
